--- a/tests/benchmark/architectural_slides/case_029_quote_argument/output.pptx
+++ b/tests/benchmark/architectural_slides/case_029_quote_argument/output.pptx
@@ -910,7 +910,7 @@
         <p:spPr>
           <a:xfrm>
             <a:off x="640080" y="411480"/>
-            <a:ext cx="7863840" cy="502920"/>
+            <a:ext cx="7863840" cy="601218"/>
           </a:xfrm>
           <a:prstGeom prst="rect">
             <a:avLst/>
@@ -948,8 +948,8 @@
         </p:nvSpPr>
         <p:spPr>
           <a:xfrm>
-            <a:off x="640080" y="1028700"/>
-            <a:ext cx="7863840" cy="1157478"/>
+            <a:off x="640080" y="1126998"/>
+            <a:ext cx="7863840" cy="1123074"/>
           </a:xfrm>
           <a:prstGeom prst="rect">
             <a:avLst/>
@@ -987,8 +987,8 @@
         </p:nvSpPr>
         <p:spPr>
           <a:xfrm>
-            <a:off x="640080" y="2300478"/>
-            <a:ext cx="7863840" cy="2035302"/>
+            <a:off x="640080" y="2364372"/>
+            <a:ext cx="7863840" cy="1971408"/>
           </a:xfrm>
           <a:prstGeom prst="rect">
             <a:avLst/>

--- a/tests/benchmark/architectural_slides/case_029_quote_argument/output.pptx
+++ b/tests/benchmark/architectural_slides/case_029_quote_argument/output.pptx
@@ -910,7 +910,7 @@
         <p:spPr>
           <a:xfrm>
             <a:off x="640080" y="411480"/>
-            <a:ext cx="7863840" cy="601218"/>
+            <a:ext cx="7863840" cy="621792"/>
           </a:xfrm>
           <a:prstGeom prst="rect">
             <a:avLst/>
@@ -948,8 +948,8 @@
         </p:nvSpPr>
         <p:spPr>
           <a:xfrm>
-            <a:off x="640080" y="1126998"/>
-            <a:ext cx="7863840" cy="1123074"/>
+            <a:off x="640080" y="1402629"/>
+            <a:ext cx="4875581" cy="2350008"/>
           </a:xfrm>
           <a:prstGeom prst="rect">
             <a:avLst/>
@@ -965,9 +965,9 @@
               <a:buNone/>
             </a:pPr>
             <a:r>
-              <a:rPr lang="en-US" sz="1800" dirty="0">
+              <a:rPr lang="en-US" sz="3400" b="1" dirty="0">
                 <a:solidFill>
-                  <a:srgbClr val="4A4A4A"/>
+                  <a:srgbClr val="1A1A1A"/>
                 </a:solidFill>
                 <a:latin typeface="Microsoft YaHei" pitchFamily="34" charset="0"/>
                 <a:ea typeface="Microsoft YaHei" pitchFamily="34" charset="-122"/>
@@ -975,7 +975,7 @@
               </a:rPr>
               <a:t>“建筑应首先服务患者路径，而非反过来让路径适应建筑。”</a:t>
             </a:r>
-            <a:endParaRPr lang="en-US" sz="1800" dirty="0"/>
+            <a:endParaRPr lang="en-US" sz="3400" dirty="0"/>
           </a:p>
         </p:txBody>
       </p:sp>
@@ -987,8 +987,8 @@
         </p:nvSpPr>
         <p:spPr>
           <a:xfrm>
-            <a:off x="640080" y="2364372"/>
-            <a:ext cx="7863840" cy="1971408"/>
+            <a:off x="6302045" y="2932968"/>
+            <a:ext cx="2201875" cy="892698"/>
           </a:xfrm>
           <a:prstGeom prst="rect">
             <a:avLst/>
@@ -1004,51 +1004,51 @@
               <a:buNone/>
             </a:pPr>
             <a:r>
-              <a:rPr lang="en-US" sz="1600" dirty="0">
+              <a:rPr lang="en-US" sz="1200" dirty="0">
                 <a:solidFill>
-                  <a:srgbClr val="1A1A1A"/>
+                  <a:srgbClr val="777777"/>
                 </a:solidFill>
                 <a:latin typeface="Microsoft YaHei" pitchFamily="34" charset="0"/>
                 <a:ea typeface="Microsoft YaHei" pitchFamily="34" charset="-122"/>
                 <a:cs typeface="Microsoft YaHei" pitchFamily="34" charset="-120"/>
               </a:rPr>
-              <a:t>· 路径优先</a:t>
+              <a:t>01. 路径优先</a:t>
             </a:r>
-            <a:endParaRPr lang="en-US" sz="1600" dirty="0"/>
+            <a:endParaRPr lang="en-US" sz="1200" dirty="0"/>
           </a:p>
           <a:p>
             <a:pPr algn="l" indent="0" marL="0">
               <a:buNone/>
             </a:pPr>
             <a:r>
-              <a:rPr lang="en-US" sz="1600" dirty="0">
+              <a:rPr lang="en-US" sz="1200" dirty="0">
                 <a:solidFill>
-                  <a:srgbClr val="1A1A1A"/>
+                  <a:srgbClr val="777777"/>
                 </a:solidFill>
                 <a:latin typeface="Microsoft YaHei" pitchFamily="34" charset="0"/>
                 <a:ea typeface="Microsoft YaHei" pitchFamily="34" charset="-122"/>
                 <a:cs typeface="Microsoft YaHei" pitchFamily="34" charset="-120"/>
               </a:rPr>
-              <a:t>· 公共性</a:t>
+              <a:t>02. 公共性</a:t>
             </a:r>
-            <a:endParaRPr lang="en-US" sz="1600" dirty="0"/>
+            <a:endParaRPr lang="en-US" sz="1200" dirty="0"/>
           </a:p>
           <a:p>
             <a:pPr algn="l" indent="0" marL="0">
               <a:buNone/>
             </a:pPr>
             <a:r>
-              <a:rPr lang="en-US" sz="1600" dirty="0">
+              <a:rPr lang="en-US" sz="1200" dirty="0">
                 <a:solidFill>
-                  <a:srgbClr val="1A1A1A"/>
+                  <a:srgbClr val="777777"/>
                 </a:solidFill>
                 <a:latin typeface="Microsoft YaHei" pitchFamily="34" charset="0"/>
                 <a:ea typeface="Microsoft YaHei" pitchFamily="34" charset="-122"/>
                 <a:cs typeface="Microsoft YaHei" pitchFamily="34" charset="-120"/>
               </a:rPr>
-              <a:t>· 分期弹性</a:t>
+              <a:t>03. 分期弹性</a:t>
             </a:r>
-            <a:endParaRPr lang="en-US" sz="1600" dirty="0"/>
+            <a:endParaRPr lang="en-US" sz="1200" dirty="0"/>
           </a:p>
         </p:txBody>
       </p:sp>

--- a/tests/benchmark/architectural_slides/case_029_quote_argument/output.pptx
+++ b/tests/benchmark/architectural_slides/case_029_quote_argument/output.pptx
@@ -910,7 +910,7 @@
         <p:spPr>
           <a:xfrm>
             <a:off x="640080" y="411480"/>
-            <a:ext cx="7863840" cy="621792"/>
+            <a:ext cx="7863840" cy="601218"/>
           </a:xfrm>
           <a:prstGeom prst="rect">
             <a:avLst/>
@@ -948,7 +948,7 @@
         </p:nvSpPr>
         <p:spPr>
           <a:xfrm>
-            <a:off x="640080" y="1402629"/>
+            <a:off x="640080" y="1383701"/>
             <a:ext cx="4875581" cy="2350008"/>
           </a:xfrm>
           <a:prstGeom prst="rect">
@@ -987,8 +987,8 @@
         </p:nvSpPr>
         <p:spPr>
           <a:xfrm>
-            <a:off x="6302045" y="2932968"/>
-            <a:ext cx="2201875" cy="892698"/>
+            <a:off x="6302045" y="2923916"/>
+            <a:ext cx="2201875" cy="898459"/>
           </a:xfrm>
           <a:prstGeom prst="rect">
             <a:avLst/>
